--- a/week-02/presentations/ppts/day-04-ai-strategy-research-summaries.pptx
+++ b/week-02/presentations/ppts/day-04-ai-strategy-research-summaries.pptx
@@ -5476,7 +5476,7 @@
             </a:pPr>
             <a:r>
               <a:rPr/>
-              <a:t>1 internal “voice of customer” Slack export (50 messages)</a:t>
+              <a:t>1 internal “voice of customer” Slack export (33 messages)</a:t>
             </a:r>
           </a:p>
           <a:p>
@@ -6528,7 +6528,7 @@
             </a:pPr>
             <a:r>
               <a:rPr/>
-              <a:t>👥 Activity 4 — Brief Assembly + Provenance</a:t>
+              <a:t>👥 Activity 4 — Brief Assembly + Provenance Log</a:t>
             </a:r>
           </a:p>
         </p:txBody>
@@ -7525,7 +7525,7 @@
             </a:pPr>
             <a:r>
               <a:rPr/>
-              <a:t>Demand verbs, not categories; cap themes at 5–7</a:t>
+              <a:t>Demand verbs, not categories; cap themes at 5</a:t>
             </a:r>
           </a:p>
           <a:p>
@@ -7543,7 +7543,7 @@
             </a:pPr>
             <a:r>
               <a:rPr/>
-              <a:t>“Ticket #4” doesn’t exist</a:t>
+              <a:t>“Ticket T-16” doesn’t exist (pack stops at T-14)</a:t>
             </a:r>
           </a:p>
           <a:p>

--- a/week-02/presentations/ppts/day-04-ai-strategy-research-summaries.pptx
+++ b/week-02/presentations/ppts/day-04-ai-strategy-research-summaries.pptx
@@ -5844,7 +5844,7 @@
             </a:pPr>
             <a:r>
               <a:rPr/>
-              <a:t>🛇 The Bright Line</a:t>
+              <a:t>🚫 The Bright Line</a:t>
             </a:r>
           </a:p>
         </p:txBody>
@@ -5887,25 +5887,25 @@
             </a:pPr>
             <a:r>
               <a:rPr/>
-              <a:t>“Structure these two product tour transcripts into a comparison matrix”</a:t>
-            </a:r>
-          </a:p>
-          <a:p>
-            <a:pPr lvl="0" indent="0" marL="0">
-              <a:buNone/>
-            </a:pPr>
-            <a:r>
-              <a:rPr/>
-              <a:t>“Identify the 3 most important questions these materials don’t answer”</a:t>
-            </a:r>
-          </a:p>
-          <a:p>
-            <a:pPr lvl="0" indent="0" marL="0">
-              <a:buNone/>
-            </a:pPr>
-            <a:r>
-              <a:rPr/>
-              <a:t>“Tell me what’s missing relative to my own product”</a:t>
+              <a:t>“Structure these tour transcripts into a matrix”</a:t>
+            </a:r>
+          </a:p>
+          <a:p>
+            <a:pPr lvl="0" indent="0" marL="0">
+              <a:buNone/>
+            </a:pPr>
+            <a:r>
+              <a:rPr/>
+              <a:t>“What 3 questions do these not answer?”</a:t>
+            </a:r>
+          </a:p>
+          <a:p>
+            <a:pPr lvl="0" indent="0" marL="0">
+              <a:buNone/>
+            </a:pPr>
+            <a:r>
+              <a:rPr/>
+              <a:t>“What’s missing vs. our product?”</a:t>
             </a:r>
           </a:p>
           <a:p>
@@ -5941,7 +5941,7 @@
             </a:pPr>
             <a:r>
               <a:rPr/>
-              <a:t>“Cite a study showing dispatcher productivity gains”</a:t>
+              <a:t>“Cite a study on dispatcher productivity”</a:t>
             </a:r>
           </a:p>
         </p:txBody>
@@ -6482,6 +6482,31 @@
             <a:r>
               <a:rPr/>
               <a:t>A trust-building artifact: documents where AI was used, which prompts, what validation was done, and where the AI was wrong.</a:t>
+            </a:r>
+          </a:p>
+          <a:p>
+            <a:pPr lvl="0" indent="0">
+              <a:buNone/>
+            </a:pPr>
+            <a:r>
+              <a:rPr>
+                <a:latin typeface="Courier"/>
+              </a:rPr>
+              <a:t>## Provenance log
+### AI-generated sections
+| Section | Prompts (link) | Validation | Findings |
+|---------|----------------|------------|----------|
+| Pain themes | Pattern Library #3 | All citations verified | Cut 1 hallucinated theme |
+| Competitive matrix | Pattern Library #5 | Manual check vs source | Flagged 2 silent cells |
+| Missing questions | Pattern Library #6 | Triad consensus | Adopted 2 of 3 |
+### Where AI was wrong
+- Lumped "reconcile" and "timecard" into single theme; we split them
+- Inferred a "training" pain theme with no source; cut entirely
+- Cited "Ticket T-16" — does not exist; replaced with T-11
+### Manual hand-written sections
+- Executive summary
+- Strategy implications
+- This log</a:t>
             </a:r>
           </a:p>
         </p:txBody>

--- a/week-02/presentations/ppts/day-04-ai-strategy-research-summaries.pptx
+++ b/week-02/presentations/ppts/day-04-ai-strategy-research-summaries.pptx
@@ -6779,7 +6779,7 @@
             </a:pPr>
             <a:r>
               <a:rPr/>
-              <a:t>Bridge to Week 3 PRDs</a:t>
+              <a:t>Bridge to Week 3 Product Requirements Documents (PRDs)</a:t>
             </a:r>
           </a:p>
           <a:p>

--- a/week-02/presentations/ppts/day-04-ai-strategy-research-summaries.pptx
+++ b/week-02/presentations/ppts/day-04-ai-strategy-research-summaries.pptx
@@ -6017,12 +6017,45 @@
             </a:r>
           </a:p>
           <a:p>
+            <a:pPr lvl="0" indent="0">
+              <a:buNone/>
+            </a:pPr>
+            <a:r>
+              <a:rPr>
+                <a:latin typeface="Courier"/>
+              </a:rPr>
+              <a:t>Role: Competitive analyst.
+Context: Pasting in 2 competitor product tour transcripts plus
+their public pricing pages.
+Task: Build a comparison matrix.
+Constraints:
+- Use only facts from the materials I pasted
+- Do NOT pull from your training data
+- Flag any cell where the source is silent
+Format: Markdown table, with citation column.</a:t>
+            </a:r>
+          </a:p>
+          <a:p>
             <a:pPr lvl="0" indent="0" marL="0">
               <a:buNone/>
             </a:pPr>
             <a:r>
               <a:rPr/>
               <a:t>Prompt 2 — Tell us what’s missing:</a:t>
+            </a:r>
+          </a:p>
+          <a:p>
+            <a:pPr lvl="0" indent="0">
+              <a:buNone/>
+            </a:pPr>
+            <a:r>
+              <a:rPr>
+                <a:latin typeface="Courier"/>
+              </a:rPr>
+              <a:t>From the matrix above, what 3 questions about these competitors
+do the source materials NOT answer? For each, suggest where a
+TPM should look (analyst reports, customer interviews, public
+earnings calls).</a:t>
             </a:r>
           </a:p>
         </p:txBody>
@@ -7679,6 +7712,44 @@
             <a:r>
               <a:rPr/>
               <a:t>📝 The Validated Synthesis Prompt</a:t>
+            </a:r>
+          </a:p>
+        </p:txBody>
+      </p:sp>
+      <p:sp>
+        <p:nvSpPr>
+          <p:cNvPr id="3" name="Content Placeholder 2"/>
+          <p:cNvSpPr>
+            <a:spLocks noGrp="1"/>
+          </p:cNvSpPr>
+          <p:nvPr>
+            <p:ph idx="1"/>
+          </p:nvPr>
+        </p:nvSpPr>
+        <p:spPr/>
+        <p:txBody>
+          <a:bodyPr/>
+          <a:lstStyle/>
+          <a:p>
+            <a:pPr lvl="0" indent="0">
+              <a:buNone/>
+            </a:pPr>
+            <a:r>
+              <a:rPr>
+                <a:latin typeface="Courier"/>
+              </a:rPr>
+              <a:t>Role: Research analyst supporting a TPM.
+Context: Below are [N] interview transcripts and [M] support tickets
+from [user segment]. I am investigating [problem statement].
+Task: Extract the top 5 recurring pain themes.
+Constraints:
+- Each theme must cite 2+ specific source identifiers (e.g., "Interview A3, Ticket T-04")
+- Themes must be verbs, not categories
+- Flag any theme you inferred without direct evidence
+- At the bottom, list 3 questions the sources do NOT answer
+Format: Markdown list; each entry: Theme / Evidence / Confidence (H/M/L) /
+Inferred? (Y/N). End with "What's missing" section.
+</a:t>
             </a:r>
           </a:p>
         </p:txBody>

--- a/week-02/presentations/ppts/day-04-ai-strategy-research-summaries.pptx
+++ b/week-02/presentations/ppts/day-04-ai-strategy-research-summaries.pptx
@@ -792,7 +792,7 @@
             </a:pPr>
             <a:r>
               <a:rPr/>
-              <a:t>Surface in the room: “How many themes did your triad cut?” Normalize cutting. Triads who cut nothing didn’t actually verify.</a:t>
+              <a:t>Surface in the room: “How many themes did your quad cut?” Normalize cutting. Quads who cut nothing didn’t actually verify.</a:t>
             </a:r>
           </a:p>
         </p:txBody>
@@ -1120,7 +1120,7 @@
             </a:pPr>
             <a:r>
               <a:rPr/>
-              <a:t>Walk the room. If any triad asks AI “what is the market size” — pause and use it as a teaching moment for the whole cohort.</a:t>
+              <a:t>Walk the room. If any quad asks AI “what is the market size” — pause and use it as a teaching moment for the whole cohort.</a:t>
             </a:r>
           </a:p>
         </p:txBody>
@@ -1284,7 +1284,7 @@
             </a:pPr>
             <a:r>
               <a:rPr/>
-              <a:t>If a triad submits an all-AI brief, push back hard. The hand-written sections are non-negotiable.</a:t>
+              <a:t>If a quad submits an all-AI brief, push back hard. The hand-written sections are non-negotiable.</a:t>
             </a:r>
           </a:p>
         </p:txBody>
@@ -1694,7 +1694,7 @@
             </a:pPr>
             <a:r>
               <a:rPr/>
-              <a:t>Closing reflection. Hearing each triad name a specific over-confidence anchor calibrates the cohort for the rest of the academy’s AI use.</a:t>
+              <a:t>Closing reflection. Hearing each quad name a specific over-confidence anchor calibrates the cohort for the rest of the academy’s AI use.</a:t>
             </a:r>
           </a:p>
         </p:txBody>
@@ -2104,7 +2104,7 @@
             </a:pPr>
             <a:r>
               <a:rPr/>
-              <a:t>This is the single most-reused prompt of Week 2. Triads should add it to their Pattern Library after today.</a:t>
+              <a:t>This is the single most-reused prompt of Week 2. Quads should add it to their Pattern Library after today.</a:t>
             </a:r>
           </a:p>
         </p:txBody>
@@ -2186,7 +2186,7 @@
             </a:pPr>
             <a:r>
               <a:rPr/>
-              <a:t>If a triad’s first attempt looks “fine,” ask them to verify three specific citations. Most will fail the verification.</a:t>
+              <a:t>If a quad’s first attempt looks “fine,” ask them to verify three specific citations. Most will fail the verification.</a:t>
             </a:r>
           </a:p>
         </p:txBody>
@@ -5557,7 +5557,7 @@
             </a:pPr>
             <a:r>
               <a:rPr/>
-              <a:t>Each triad member takes a different theme produced by the AI and verifies every citation against the source. Mark any that fail.</a:t>
+              <a:t>Each quad member takes a different theme produced by the AI and verifies every citation against the source. Mark any that fail.</a:t>
             </a:r>
           </a:p>
           <a:p>
@@ -5668,7 +5668,7 @@
             </a:pPr>
             <a:r>
               <a:rPr b="1"/>
-              <a:t>Triads • 40 minutes</a:t>
+              <a:t>Quads • 40 minutes</a:t>
             </a:r>
           </a:p>
           <a:p>
@@ -6130,7 +6130,7 @@
             </a:pPr>
             <a:r>
               <a:rPr b="1"/>
-              <a:t>Triads • 40 minutes</a:t>
+              <a:t>Quads • 40 minutes</a:t>
             </a:r>
           </a:p>
           <a:p>
@@ -6531,7 +6531,7 @@
 |---------|----------------|------------|----------|
 | Pain themes | Pattern Library #3 | All citations verified | Cut 1 hallucinated theme |
 | Competitive matrix | Pattern Library #5 | Manual check vs source | Flagged 2 silent cells |
-| Missing questions | Pattern Library #6 | Triad consensus | Adopted 2 of 3 |
+| Missing questions | Pattern Library #6 | Quad consensus | Adopted 2 of 3 |
 ### Where AI was wrong
 - Lumped "reconcile" and "timecard" into single theme; we split them
 - Inferred a "training" pain theme with no source; cut entirely
@@ -6614,7 +6614,7 @@
             </a:pPr>
             <a:r>
               <a:rPr b="1"/>
-              <a:t>Triads • 45 minutes • Readouts</a:t>
+              <a:t>Quads • 45 minutes • Readouts</a:t>
             </a:r>
           </a:p>
           <a:p>
@@ -7004,7 +7004,7 @@
             </a:pPr>
             <a:r>
               <a:rPr/>
-              <a:t>Assemble an AI-Assembled Strategy Brief for your triad’s problem</a:t>
+              <a:t>Assemble an AI-Assembled Strategy Brief for your quad’s problem</a:t>
             </a:r>
           </a:p>
         </p:txBody>
@@ -7824,7 +7824,7 @@
             </a:pPr>
             <a:r>
               <a:rPr b="1"/>
-              <a:t>Triads • 35 minutes</a:t>
+              <a:t>Quads • 35 minutes</a:t>
             </a:r>
           </a:p>
           <a:p>

--- a/week-02/presentations/ppts/day-04-ai-strategy-research-summaries.pptx
+++ b/week-02/presentations/ppts/day-04-ai-strategy-research-summaries.pptx
@@ -5668,7 +5668,7 @@
             </a:pPr>
             <a:r>
               <a:rPr b="1"/>
-              <a:t>Quads • 40 minutes</a:t>
+              <a:t>Quads • 50 minutes</a:t>
             </a:r>
           </a:p>
           <a:p>
@@ -6130,7 +6130,7 @@
             </a:pPr>
             <a:r>
               <a:rPr b="1"/>
-              <a:t>Quads • 40 minutes</a:t>
+              <a:t>Quads • 50 minutes</a:t>
             </a:r>
           </a:p>
           <a:p>
@@ -6614,7 +6614,7 @@
             </a:pPr>
             <a:r>
               <a:rPr b="1"/>
-              <a:t>Quads • 45 minutes • Readouts</a:t>
+              <a:t>Quads • 55 minutes • Readouts</a:t>
             </a:r>
           </a:p>
           <a:p>
@@ -7824,7 +7824,7 @@
             </a:pPr>
             <a:r>
               <a:rPr b="1"/>
-              <a:t>Quads • 35 minutes</a:t>
+              <a:t>Quads • 45 minutes</a:t>
             </a:r>
           </a:p>
           <a:p>

--- a/week-02/presentations/ppts/day-04-ai-strategy-research-summaries.pptx
+++ b/week-02/presentations/ppts/day-04-ai-strategy-research-summaries.pptx
@@ -5695,7 +5695,7 @@
             </a:pPr>
             <a:r>
               <a:rPr/>
-              <a:t>15 min run (split pack across 2–3 calls if needed)</a:t>
+              <a:t>25 min run (split pack across 2–3 calls if needed)</a:t>
             </a:r>
           </a:p>
           <a:p>
@@ -6148,7 +6148,7 @@
             </a:pPr>
             <a:r>
               <a:rPr/>
-              <a:t>15 min: structure-what-we-know prompt + verify cells</a:t>
+              <a:t>25 min: structure-what-we-know prompt + verify cells</a:t>
             </a:r>
           </a:p>
           <a:p>
@@ -6632,7 +6632,7 @@
             </a:pPr>
             <a:r>
               <a:rPr/>
-              <a:t>15 min: hand-write executive summary</a:t>
+              <a:t>25 min: hand-write executive summary</a:t>
             </a:r>
           </a:p>
           <a:p>
@@ -7860,7 +7860,7 @@
             </a:pPr>
             <a:r>
               <a:rPr/>
-              <a:t>15 min: iterate the prompt; re-run; compare</a:t>
+              <a:t>25 min: iterate the prompt; re-run; compare</a:t>
             </a:r>
           </a:p>
           <a:p>
